--- a/assets/final.pptx
+++ b/assets/final.pptx
@@ -109,6 +109,11 @@
       </a:defRPr>
     </a:lvl9pPr>
   </p:defaultTextStyle>
+  <p:extLst>
+    <p:ext uri="{EFAFB233-063F-42B5-8137-9DF3F51BA10A}">
+      <p15:sldGuideLst xmlns:p15="http://schemas.microsoft.com/office/powerpoint/2012/main"/>
+    </p:ext>
+  </p:extLst>
 </p:presentation>
 </file>
 
@@ -7118,10 +7123,10 @@
       </p:sp>
       <p:pic>
         <p:nvPicPr>
-          <p:cNvPr id="17" name="Picture 16" descr="A screenshot of a cell phone&#10;&#10;Description generated with very high confidence">
+          <p:cNvPr id="7" name="Picture 6" descr="A screenshot of a cell phone&#10;&#10;Description generated with high confidence">
             <a:extLst>
               <a:ext uri="{FF2B5EF4-FFF2-40B4-BE49-F238E27FC236}">
-                <a16:creationId xmlns:a16="http://schemas.microsoft.com/office/drawing/2014/main" id="{3EA0718C-9984-452E-ABF6-B5DB19583CF9}"/>
+                <a16:creationId xmlns:a16="http://schemas.microsoft.com/office/drawing/2014/main" id="{43DBDA82-F6A1-41C3-9DFB-211A1B2F0ACF}"/>
               </a:ext>
             </a:extLst>
           </p:cNvPr>
@@ -7138,8 +7143,8 @@
         </p:blipFill>
         <p:spPr>
           <a:xfrm>
-            <a:off x="-1" y="1521922"/>
-            <a:ext cx="6176978" cy="5336078"/>
+            <a:off x="0" y="3384660"/>
+            <a:ext cx="6960791" cy="3539529"/>
           </a:xfrm>
           <a:prstGeom prst="rect">
             <a:avLst/>
@@ -7148,10 +7153,10 @@
       </p:pic>
       <p:pic>
         <p:nvPicPr>
-          <p:cNvPr id="21" name="Picture 20" descr="A close up of a screen&#10;&#10;Description generated with high confidence">
+          <p:cNvPr id="12" name="Picture 11">
             <a:extLst>
               <a:ext uri="{FF2B5EF4-FFF2-40B4-BE49-F238E27FC236}">
-                <a16:creationId xmlns:a16="http://schemas.microsoft.com/office/drawing/2014/main" id="{C2F30D70-FE64-43F0-93D9-2007D8BC8C41}"/>
+                <a16:creationId xmlns:a16="http://schemas.microsoft.com/office/drawing/2014/main" id="{D6DB8BB7-8205-4997-AA85-EC6A5DBF3C87}"/>
               </a:ext>
             </a:extLst>
           </p:cNvPr>
@@ -7168,8 +7173,68 @@
         </p:blipFill>
         <p:spPr>
           <a:xfrm>
-            <a:off x="5996997" y="1521922"/>
-            <a:ext cx="6195003" cy="5348778"/>
+            <a:off x="0" y="1406968"/>
+            <a:ext cx="3746441" cy="1842712"/>
+          </a:xfrm>
+          <a:prstGeom prst="rect">
+            <a:avLst/>
+          </a:prstGeom>
+        </p:spPr>
+      </p:pic>
+      <p:pic>
+        <p:nvPicPr>
+          <p:cNvPr id="14" name="Picture 13" descr="A picture containing furniture&#10;&#10;Description generated with high confidence">
+            <a:extLst>
+              <a:ext uri="{FF2B5EF4-FFF2-40B4-BE49-F238E27FC236}">
+                <a16:creationId xmlns:a16="http://schemas.microsoft.com/office/drawing/2014/main" id="{A44CD307-F1E6-428D-8B35-9E835EA647D1}"/>
+              </a:ext>
+            </a:extLst>
+          </p:cNvPr>
+          <p:cNvPicPr>
+            <a:picLocks noChangeAspect="1"/>
+          </p:cNvPicPr>
+          <p:nvPr/>
+        </p:nvPicPr>
+        <p:blipFill>
+          <a:blip r:embed="rId4"/>
+          <a:stretch>
+            <a:fillRect/>
+          </a:stretch>
+        </p:blipFill>
+        <p:spPr>
+          <a:xfrm>
+            <a:off x="8566798" y="1320240"/>
+            <a:ext cx="3625202" cy="2234801"/>
+          </a:xfrm>
+          <a:prstGeom prst="rect">
+            <a:avLst/>
+          </a:prstGeom>
+        </p:spPr>
+      </p:pic>
+      <p:pic>
+        <p:nvPicPr>
+          <p:cNvPr id="16" name="Picture 15" descr="A close up of a black background&#10;&#10;Description generated with high confidence">
+            <a:extLst>
+              <a:ext uri="{FF2B5EF4-FFF2-40B4-BE49-F238E27FC236}">
+                <a16:creationId xmlns:a16="http://schemas.microsoft.com/office/drawing/2014/main" id="{851932CC-83B4-4766-9789-B86C1F4D06E9}"/>
+              </a:ext>
+            </a:extLst>
+          </p:cNvPr>
+          <p:cNvPicPr>
+            <a:picLocks noChangeAspect="1"/>
+          </p:cNvPicPr>
+          <p:nvPr/>
+        </p:nvPicPr>
+        <p:blipFill>
+          <a:blip r:embed="rId5"/>
+          <a:stretch>
+            <a:fillRect/>
+          </a:stretch>
+        </p:blipFill>
+        <p:spPr>
+          <a:xfrm>
+            <a:off x="6753225" y="3454623"/>
+            <a:ext cx="5438775" cy="3352800"/>
           </a:xfrm>
           <a:prstGeom prst="rect">
             <a:avLst/>
